--- a/Final Presentation Marketing AI Project.pptx
+++ b/Final Presentation Marketing AI Project.pptx
@@ -251,6 +251,9 @@
     </a:lvl9pPr>
   </p:defaultTextStyle>
   <p:extLst>
+    <p:ext uri="{EFAFB233-063F-42B5-8137-9DF3F51BA10A}">
+      <p15:sldGuideLst xmlns:p15="http://schemas.microsoft.com/office/powerpoint/2012/main"/>
+    </p:ext>
     <p:ext uri="GoogleSlidesCustomDataVersion2">
       <go:slidesCustomData xmlns:go="http://customooxmlschemas.google.com/" xmlns:ahyp="http://schemas.microsoft.com/office/drawing/2018/hyperlinkcolor" xmlns:p15="http://schemas.microsoft.com/office/powerpoint/2012/main" xmlns:p14="http://schemas.microsoft.com/office/powerpoint/2010/main" xmlns:com="http://schemas.openxmlformats.org/drawingml/2006/compatibility" xmlns:pvml="urn:schemas-microsoft-com:office:powerpoint" xmlns:v="urn:schemas-microsoft-com:vml" xmlns:o="urn:schemas-microsoft-com:office:office" xmlns:dgm="http://schemas.openxmlformats.org/drawingml/2006/diagram" xmlns:c="http://schemas.openxmlformats.org/drawingml/2006/chart" xmlns:mv="urn:schemas-microsoft-com:mac:vml" xmlns:mc="http://schemas.openxmlformats.org/markup-compatibility/2006" xmlns="" r:id="rId16" roundtripDataSignature="AMtx7mjz2qH+Xd372yjJLbInyhEczItYmg=="/>
     </p:ext>
@@ -10454,7 +10457,7 @@
               <a:buNone/>
             </a:pPr>
             <a:r>
-              <a:rPr lang="en-US" sz="1000" b="1">
+              <a:rPr lang="en-US" sz="1000" b="1" dirty="0">
                 <a:solidFill>
                   <a:srgbClr val="C4895A"/>
                 </a:solidFill>
@@ -10463,9 +10466,33 @@
                 <a:cs typeface="Calibri"/>
                 <a:sym typeface="Calibri"/>
               </a:rPr>
-              <a:t>Step 2  select_channels()</a:t>
+              <a:t>Step 2  </a:t>
             </a:r>
-            <a:endParaRPr sz="1000">
+            <a:r>
+              <a:rPr lang="en-US" sz="1000" b="1" dirty="0" err="1">
+                <a:solidFill>
+                  <a:srgbClr val="C4895A"/>
+                </a:solidFill>
+                <a:latin typeface="Calibri"/>
+                <a:ea typeface="Calibri"/>
+                <a:cs typeface="Calibri"/>
+                <a:sym typeface="Calibri"/>
+              </a:rPr>
+              <a:t>select_channels</a:t>
+            </a:r>
+            <a:r>
+              <a:rPr lang="en-US" sz="1000" b="1" dirty="0">
+                <a:solidFill>
+                  <a:srgbClr val="C4895A"/>
+                </a:solidFill>
+                <a:latin typeface="Calibri"/>
+                <a:ea typeface="Calibri"/>
+                <a:cs typeface="Calibri"/>
+                <a:sym typeface="Calibri"/>
+              </a:rPr>
+              <a:t>()</a:t>
+            </a:r>
+            <a:endParaRPr sz="1000" dirty="0">
               <a:solidFill>
                 <a:schemeClr val="dk1"/>
               </a:solidFill>
@@ -10526,7 +10553,7 @@
                 <a:cs typeface="Calibri"/>
                 <a:sym typeface="Calibri"/>
               </a:rPr>
-              <a:t>Meta Ads (Instagram)  [CPC]</a:t>
+              <a:t>Google Search  [CPC]</a:t>
             </a:r>
             <a:endParaRPr sz="1300">
               <a:solidFill>
@@ -10580,7 +10607,7 @@
               <a:buNone/>
             </a:pPr>
             <a:r>
-              <a:rPr lang="en-US" sz="1300">
+              <a:rPr lang="en-US" sz="1300" dirty="0">
                 <a:solidFill>
                   <a:srgbClr val="161412"/>
                 </a:solidFill>
@@ -10589,9 +10616,9 @@
                 <a:cs typeface="Calibri"/>
                 <a:sym typeface="Calibri"/>
               </a:rPr>
-              <a:t>TikTok Ads  [CPM]</a:t>
+              <a:t>Retargeting  [CPA]</a:t>
             </a:r>
-            <a:endParaRPr sz="1300">
+            <a:endParaRPr sz="1300" dirty="0">
               <a:solidFill>
                 <a:schemeClr val="dk1"/>
               </a:solidFill>
@@ -10643,7 +10670,7 @@
               <a:buNone/>
             </a:pPr>
             <a:r>
-              <a:rPr lang="en-US" sz="1300">
+              <a:rPr lang="en-US" sz="1300" dirty="0">
                 <a:solidFill>
                   <a:srgbClr val="161412"/>
                 </a:solidFill>
@@ -10652,9 +10679,9 @@
                 <a:cs typeface="Calibri"/>
                 <a:sym typeface="Calibri"/>
               </a:rPr>
-              <a:t>Google Search  [CPC]</a:t>
+              <a:t>Meta Ads (Instagram)  [CPC]</a:t>
             </a:r>
-            <a:endParaRPr sz="1300">
+            <a:endParaRPr sz="1300" dirty="0">
               <a:solidFill>
                 <a:schemeClr val="dk1"/>
               </a:solidFill>
@@ -10804,7 +10831,7 @@
                 <a:cs typeface="Calibri"/>
                 <a:sym typeface="Calibri"/>
               </a:rPr>
-              <a:t>Meta Ads</a:t>
+              <a:t>Google Search</a:t>
             </a:r>
             <a:endParaRPr sz="1200">
               <a:solidFill>
@@ -10993,7 +11020,7 @@
                 <a:cs typeface="Calibri"/>
                 <a:sym typeface="Calibri"/>
               </a:rPr>
-              <a:t>Primary channel: largest audience, strongest conversion algorithms</a:t>
+              <a:t>Primary channel: highest purchase intent, captures active demand</a:t>
             </a:r>
             <a:endParaRPr sz="1000">
               <a:solidFill>
@@ -11047,7 +11074,7 @@
               <a:buNone/>
             </a:pPr>
             <a:r>
-              <a:rPr lang="en-US" sz="1200" b="1">
+              <a:rPr lang="en-US" sz="1200" b="1" dirty="0">
                 <a:solidFill>
                   <a:srgbClr val="161412"/>
                 </a:solidFill>
@@ -11056,9 +11083,9 @@
                 <a:cs typeface="Calibri"/>
                 <a:sym typeface="Calibri"/>
               </a:rPr>
-              <a:t>TikTok Ads</a:t>
+              <a:t>Retargeting</a:t>
             </a:r>
-            <a:endParaRPr sz="1200">
+            <a:endParaRPr sz="1200" dirty="0">
               <a:solidFill>
                 <a:schemeClr val="dk1"/>
               </a:solidFill>
@@ -11110,7 +11137,7 @@
               <a:buNone/>
             </a:pPr>
             <a:r>
-              <a:rPr lang="en-US" sz="1200">
+              <a:rPr lang="en-US" sz="1200" dirty="0">
                 <a:solidFill>
                   <a:srgbClr val="161412"/>
                 </a:solidFill>
@@ -11121,7 +11148,7 @@
               </a:rPr>
               <a:t>1,500 GBP</a:t>
             </a:r>
-            <a:endParaRPr sz="1200">
+            <a:endParaRPr sz="1200" dirty="0">
               <a:solidFill>
                 <a:schemeClr val="dk1"/>
               </a:solidFill>
@@ -11173,7 +11200,7 @@
               <a:buNone/>
             </a:pPr>
             <a:r>
-              <a:rPr lang="en-US" sz="1200" b="1">
+              <a:rPr lang="en-US" sz="1200" b="1" dirty="0">
                 <a:solidFill>
                   <a:srgbClr val="C4895A"/>
                 </a:solidFill>
@@ -11184,7 +11211,7 @@
               </a:rPr>
               <a:t>30%</a:t>
             </a:r>
-            <a:endParaRPr sz="1200">
+            <a:endParaRPr sz="1200" dirty="0">
               <a:solidFill>
                 <a:schemeClr val="dk1"/>
               </a:solidFill>
@@ -11236,7 +11263,7 @@
               <a:buNone/>
             </a:pPr>
             <a:r>
-              <a:rPr lang="en-US" sz="1000">
+              <a:rPr lang="en-US" sz="1000" dirty="0">
                 <a:solidFill>
                   <a:srgbClr val="8C8070"/>
                 </a:solidFill>
@@ -11245,9 +11272,9 @@
                 <a:cs typeface="Calibri"/>
                 <a:sym typeface="Calibri"/>
               </a:rPr>
-              <a:t>Secondary: leverages existing 42k follower base</a:t>
+              <a:t>Secondary: re-engages skincare-interested shoppers at low CPA</a:t>
             </a:r>
-            <a:endParaRPr sz="1000">
+            <a:endParaRPr lang="en-US" sz="1000" dirty="0">
               <a:solidFill>
                 <a:schemeClr val="dk1"/>
               </a:solidFill>
@@ -11308,7 +11335,7 @@
                 <a:cs typeface="Calibri"/>
                 <a:sym typeface="Calibri"/>
               </a:rPr>
-              <a:t>Google Search</a:t>
+              <a:t>Meta Ads</a:t>
             </a:r>
             <a:endParaRPr sz="1200">
               <a:solidFill>
@@ -11362,7 +11389,7 @@
               <a:buNone/>
             </a:pPr>
             <a:r>
-              <a:rPr lang="en-US" sz="1200">
+              <a:rPr lang="en-US" sz="1200" dirty="0">
                 <a:solidFill>
                   <a:srgbClr val="161412"/>
                 </a:solidFill>
@@ -11373,7 +11400,7 @@
               </a:rPr>
               <a:t>1,000 GBP</a:t>
             </a:r>
-            <a:endParaRPr sz="1200">
+            <a:endParaRPr sz="1200" dirty="0">
               <a:solidFill>
                 <a:schemeClr val="dk1"/>
               </a:solidFill>
@@ -11425,7 +11452,7 @@
               <a:buNone/>
             </a:pPr>
             <a:r>
-              <a:rPr lang="en-US" sz="1200" b="1">
+              <a:rPr lang="en-US" sz="1200" b="1" dirty="0">
                 <a:solidFill>
                   <a:srgbClr val="C4895A"/>
                 </a:solidFill>
@@ -11436,7 +11463,7 @@
               </a:rPr>
               <a:t>20%</a:t>
             </a:r>
-            <a:endParaRPr sz="1200">
+            <a:endParaRPr sz="1200" dirty="0">
               <a:solidFill>
                 <a:schemeClr val="dk1"/>
               </a:solidFill>
@@ -11497,7 +11524,7 @@
                 <a:cs typeface="Calibri"/>
                 <a:sym typeface="Calibri"/>
               </a:rPr>
-              <a:t>Supporting: captures high-intent buyers</a:t>
+              <a:t>Supporting: extends reach and reinforces first-purchase incentives</a:t>
             </a:r>
             <a:endParaRPr sz="1000">
               <a:solidFill>
@@ -11737,7 +11764,13 @@
         <p:nvGraphicFramePr>
           <p:cNvPr id="161" name="Google Shape;161;p7"/>
           <p:cNvGraphicFramePr/>
-          <p:nvPr/>
+          <p:nvPr>
+            <p:extLst>
+              <p:ext uri="{D42A27DB-BD31-4B8C-83A1-F6EECF244321}">
+                <p14:modId xmlns:p14="http://schemas.microsoft.com/office/powerpoint/2010/main" val="2556316116"/>
+              </p:ext>
+            </p:extLst>
+          </p:nvPr>
         </p:nvGraphicFramePr>
         <p:xfrm>
           <a:off x="457200" y="1325880"/>
@@ -12229,728 +12262,6 @@
                           <a:cs typeface="Calibri"/>
                           <a:sym typeface="Calibri"/>
                         </a:rPr>
-                        <a:t>Meta Ads</a:t>
-                      </a:r>
-                      <a:endParaRPr sz="1100" u="none" strike="noStrike" cap="none">
-                        <a:latin typeface="Calibri"/>
-                        <a:ea typeface="Calibri"/>
-                        <a:cs typeface="Calibri"/>
-                        <a:sym typeface="Calibri"/>
-                      </a:endParaRPr>
-                    </a:p>
-                  </a:txBody>
-                  <a:tcPr marL="91450" marR="91450" marT="45725" marB="45725">
-                    <a:lnL w="9525" cap="flat" cmpd="sng">
-                      <a:solidFill>
-                        <a:srgbClr val="D4CCC0"/>
-                      </a:solidFill>
-                      <a:prstDash val="solid"/>
-                      <a:round/>
-                      <a:headEnd type="none" w="sm" len="sm"/>
-                      <a:tailEnd type="none" w="sm" len="sm"/>
-                    </a:lnL>
-                    <a:lnR w="9525" cap="flat" cmpd="sng">
-                      <a:solidFill>
-                        <a:srgbClr val="D4CCC0"/>
-                      </a:solidFill>
-                      <a:prstDash val="solid"/>
-                      <a:round/>
-                      <a:headEnd type="none" w="sm" len="sm"/>
-                      <a:tailEnd type="none" w="sm" len="sm"/>
-                    </a:lnR>
-                    <a:lnT w="9525" cap="flat" cmpd="sng">
-                      <a:solidFill>
-                        <a:srgbClr val="D4CCC0"/>
-                      </a:solidFill>
-                      <a:prstDash val="solid"/>
-                      <a:round/>
-                      <a:headEnd type="none" w="sm" len="sm"/>
-                      <a:tailEnd type="none" w="sm" len="sm"/>
-                    </a:lnT>
-                    <a:lnB w="9525" cap="flat" cmpd="sng">
-                      <a:solidFill>
-                        <a:srgbClr val="D4CCC0"/>
-                      </a:solidFill>
-                      <a:prstDash val="solid"/>
-                      <a:round/>
-                      <a:headEnd type="none" w="sm" len="sm"/>
-                      <a:tailEnd type="none" w="sm" len="sm"/>
-                    </a:lnB>
-                  </a:tcPr>
-                </a:tc>
-                <a:tc>
-                  <a:txBody>
-                    <a:bodyPr/>
-                    <a:lstStyle/>
-                    <a:p>
-                      <a:pPr marL="0" marR="0" lvl="0" indent="0" algn="l" rtl="0">
-                        <a:spcBef>
-                          <a:spcPts val="0"/>
-                        </a:spcBef>
-                        <a:spcAft>
-                          <a:spcPts val="0"/>
-                        </a:spcAft>
-                        <a:buClr>
-                          <a:srgbClr val="000000"/>
-                        </a:buClr>
-                        <a:buSzPts val="1200"/>
-                        <a:buFont typeface="Calibri"/>
-                        <a:buNone/>
-                      </a:pPr>
-                      <a:r>
-                        <a:rPr lang="en-US" sz="1200" u="none" strike="noStrike" cap="none">
-                          <a:solidFill>
-                            <a:srgbClr val="000000"/>
-                          </a:solidFill>
-                        </a:rPr>
-                        <a:t>1.2%</a:t>
-                      </a:r>
-                      <a:endParaRPr sz="1200" u="none" strike="noStrike" cap="none"/>
-                    </a:p>
-                  </a:txBody>
-                  <a:tcPr marL="91450" marR="91450" marT="45725" marB="45725">
-                    <a:lnL w="9525" cap="flat" cmpd="sng">
-                      <a:solidFill>
-                        <a:srgbClr val="D4CCC0"/>
-                      </a:solidFill>
-                      <a:prstDash val="solid"/>
-                      <a:round/>
-                      <a:headEnd type="none" w="sm" len="sm"/>
-                      <a:tailEnd type="none" w="sm" len="sm"/>
-                    </a:lnL>
-                    <a:lnR w="9525" cap="flat" cmpd="sng">
-                      <a:solidFill>
-                        <a:srgbClr val="D4CCC0"/>
-                      </a:solidFill>
-                      <a:prstDash val="solid"/>
-                      <a:round/>
-                      <a:headEnd type="none" w="sm" len="sm"/>
-                      <a:tailEnd type="none" w="sm" len="sm"/>
-                    </a:lnR>
-                    <a:lnT w="9525" cap="flat" cmpd="sng">
-                      <a:solidFill>
-                        <a:srgbClr val="D4CCC0"/>
-                      </a:solidFill>
-                      <a:prstDash val="solid"/>
-                      <a:round/>
-                      <a:headEnd type="none" w="sm" len="sm"/>
-                      <a:tailEnd type="none" w="sm" len="sm"/>
-                    </a:lnT>
-                    <a:lnB w="9525" cap="flat" cmpd="sng">
-                      <a:solidFill>
-                        <a:srgbClr val="D4CCC0"/>
-                      </a:solidFill>
-                      <a:prstDash val="solid"/>
-                      <a:round/>
-                      <a:headEnd type="none" w="sm" len="sm"/>
-                      <a:tailEnd type="none" w="sm" len="sm"/>
-                    </a:lnB>
-                  </a:tcPr>
-                </a:tc>
-                <a:tc>
-                  <a:txBody>
-                    <a:bodyPr/>
-                    <a:lstStyle/>
-                    <a:p>
-                      <a:pPr marL="0" marR="0" lvl="0" indent="0" algn="l" rtl="0">
-                        <a:spcBef>
-                          <a:spcPts val="0"/>
-                        </a:spcBef>
-                        <a:spcAft>
-                          <a:spcPts val="0"/>
-                        </a:spcAft>
-                        <a:buClr>
-                          <a:srgbClr val="000000"/>
-                        </a:buClr>
-                        <a:buSzPts val="1200"/>
-                        <a:buFont typeface="Calibri"/>
-                        <a:buNone/>
-                      </a:pPr>
-                      <a:r>
-                        <a:rPr lang="en-US" sz="1200" u="none" strike="noStrike" cap="none">
-                          <a:solidFill>
-                            <a:srgbClr val="000000"/>
-                          </a:solidFill>
-                        </a:rPr>
-                        <a:t>11.25 GBP</a:t>
-                      </a:r>
-                      <a:endParaRPr sz="1200" u="none" strike="noStrike" cap="none"/>
-                    </a:p>
-                  </a:txBody>
-                  <a:tcPr marL="91450" marR="91450" marT="45725" marB="45725">
-                    <a:lnL w="9525" cap="flat" cmpd="sng">
-                      <a:solidFill>
-                        <a:srgbClr val="D4CCC0"/>
-                      </a:solidFill>
-                      <a:prstDash val="solid"/>
-                      <a:round/>
-                      <a:headEnd type="none" w="sm" len="sm"/>
-                      <a:tailEnd type="none" w="sm" len="sm"/>
-                    </a:lnL>
-                    <a:lnR w="9525" cap="flat" cmpd="sng">
-                      <a:solidFill>
-                        <a:srgbClr val="D4CCC0"/>
-                      </a:solidFill>
-                      <a:prstDash val="solid"/>
-                      <a:round/>
-                      <a:headEnd type="none" w="sm" len="sm"/>
-                      <a:tailEnd type="none" w="sm" len="sm"/>
-                    </a:lnR>
-                    <a:lnT w="9525" cap="flat" cmpd="sng">
-                      <a:solidFill>
-                        <a:srgbClr val="D4CCC0"/>
-                      </a:solidFill>
-                      <a:prstDash val="solid"/>
-                      <a:round/>
-                      <a:headEnd type="none" w="sm" len="sm"/>
-                      <a:tailEnd type="none" w="sm" len="sm"/>
-                    </a:lnT>
-                    <a:lnB w="9525" cap="flat" cmpd="sng">
-                      <a:solidFill>
-                        <a:srgbClr val="D4CCC0"/>
-                      </a:solidFill>
-                      <a:prstDash val="solid"/>
-                      <a:round/>
-                      <a:headEnd type="none" w="sm" len="sm"/>
-                      <a:tailEnd type="none" w="sm" len="sm"/>
-                    </a:lnB>
-                  </a:tcPr>
-                </a:tc>
-                <a:tc>
-                  <a:txBody>
-                    <a:bodyPr/>
-                    <a:lstStyle/>
-                    <a:p>
-                      <a:pPr marL="0" marR="0" lvl="0" indent="0" algn="l" rtl="0">
-                        <a:spcBef>
-                          <a:spcPts val="0"/>
-                        </a:spcBef>
-                        <a:spcAft>
-                          <a:spcPts val="0"/>
-                        </a:spcAft>
-                        <a:buClr>
-                          <a:srgbClr val="000000"/>
-                        </a:buClr>
-                        <a:buSzPts val="1200"/>
-                        <a:buFont typeface="Calibri"/>
-                        <a:buNone/>
-                      </a:pPr>
-                      <a:r>
-                        <a:rPr lang="en-US" sz="1200" u="none" strike="noStrike" cap="none">
-                          <a:solidFill>
-                            <a:srgbClr val="000000"/>
-                          </a:solidFill>
-                        </a:rPr>
-                        <a:t>4.00x</a:t>
-                      </a:r>
-                      <a:endParaRPr sz="1200" u="none" strike="noStrike" cap="none"/>
-                    </a:p>
-                  </a:txBody>
-                  <a:tcPr marL="91450" marR="91450" marT="45725" marB="45725">
-                    <a:lnL w="9525" cap="flat" cmpd="sng">
-                      <a:solidFill>
-                        <a:srgbClr val="D4CCC0"/>
-                      </a:solidFill>
-                      <a:prstDash val="solid"/>
-                      <a:round/>
-                      <a:headEnd type="none" w="sm" len="sm"/>
-                      <a:tailEnd type="none" w="sm" len="sm"/>
-                    </a:lnL>
-                    <a:lnR w="9525" cap="flat" cmpd="sng">
-                      <a:solidFill>
-                        <a:srgbClr val="D4CCC0"/>
-                      </a:solidFill>
-                      <a:prstDash val="solid"/>
-                      <a:round/>
-                      <a:headEnd type="none" w="sm" len="sm"/>
-                      <a:tailEnd type="none" w="sm" len="sm"/>
-                    </a:lnR>
-                    <a:lnT w="9525" cap="flat" cmpd="sng">
-                      <a:solidFill>
-                        <a:srgbClr val="D4CCC0"/>
-                      </a:solidFill>
-                      <a:prstDash val="solid"/>
-                      <a:round/>
-                      <a:headEnd type="none" w="sm" len="sm"/>
-                      <a:tailEnd type="none" w="sm" len="sm"/>
-                    </a:lnT>
-                    <a:lnB w="9525" cap="flat" cmpd="sng">
-                      <a:solidFill>
-                        <a:srgbClr val="D4CCC0"/>
-                      </a:solidFill>
-                      <a:prstDash val="solid"/>
-                      <a:round/>
-                      <a:headEnd type="none" w="sm" len="sm"/>
-                      <a:tailEnd type="none" w="sm" len="sm"/>
-                    </a:lnB>
-                  </a:tcPr>
-                </a:tc>
-                <a:tc>
-                  <a:txBody>
-                    <a:bodyPr/>
-                    <a:lstStyle/>
-                    <a:p>
-                      <a:pPr marL="0" marR="0" lvl="0" indent="0" algn="l" rtl="0">
-                        <a:spcBef>
-                          <a:spcPts val="0"/>
-                        </a:spcBef>
-                        <a:spcAft>
-                          <a:spcPts val="0"/>
-                        </a:spcAft>
-                        <a:buClr>
-                          <a:srgbClr val="000000"/>
-                        </a:buClr>
-                        <a:buSzPts val="1200"/>
-                        <a:buFont typeface="Calibri"/>
-                        <a:buNone/>
-                      </a:pPr>
-                      <a:r>
-                        <a:rPr lang="en-US" sz="1200" u="none" strike="noStrike" cap="none">
-                          <a:solidFill>
-                            <a:srgbClr val="000000"/>
-                          </a:solidFill>
-                        </a:rPr>
-                        <a:t>25% of 45 </a:t>
-                      </a:r>
-                      <a:endParaRPr sz="1200" u="none" strike="noStrike" cap="none"/>
-                    </a:p>
-                  </a:txBody>
-                  <a:tcPr marL="91450" marR="91450" marT="45725" marB="45725">
-                    <a:lnL w="9525" cap="flat" cmpd="sng">
-                      <a:solidFill>
-                        <a:srgbClr val="D4CCC0"/>
-                      </a:solidFill>
-                      <a:prstDash val="solid"/>
-                      <a:round/>
-                      <a:headEnd type="none" w="sm" len="sm"/>
-                      <a:tailEnd type="none" w="sm" len="sm"/>
-                    </a:lnL>
-                    <a:lnR w="9525" cap="flat" cmpd="sng">
-                      <a:solidFill>
-                        <a:srgbClr val="D4CCC0"/>
-                      </a:solidFill>
-                      <a:prstDash val="solid"/>
-                      <a:round/>
-                      <a:headEnd type="none" w="sm" len="sm"/>
-                      <a:tailEnd type="none" w="sm" len="sm"/>
-                    </a:lnR>
-                    <a:lnT w="9525" cap="flat" cmpd="sng">
-                      <a:solidFill>
-                        <a:srgbClr val="D4CCC0"/>
-                      </a:solidFill>
-                      <a:prstDash val="solid"/>
-                      <a:round/>
-                      <a:headEnd type="none" w="sm" len="sm"/>
-                      <a:tailEnd type="none" w="sm" len="sm"/>
-                    </a:lnT>
-                    <a:lnB w="9525" cap="flat" cmpd="sng">
-                      <a:solidFill>
-                        <a:srgbClr val="D4CCC0"/>
-                      </a:solidFill>
-                      <a:prstDash val="solid"/>
-                      <a:round/>
-                      <a:headEnd type="none" w="sm" len="sm"/>
-                      <a:tailEnd type="none" w="sm" len="sm"/>
-                    </a:lnB>
-                  </a:tcPr>
-                </a:tc>
-                <a:extLst>
-                  <a:ext uri="{0D108BD9-81ED-4DB2-BD59-A6C34878D82A}">
-                    <a16:rowId xmlns:a16="http://schemas.microsoft.com/office/drawing/2014/main" val="10001"/>
-                  </a:ext>
-                </a:extLst>
-              </a:tr>
-              <a:tr h="384050">
-                <a:tc>
-                  <a:txBody>
-                    <a:bodyPr/>
-                    <a:lstStyle/>
-                    <a:p>
-                      <a:pPr marL="0" marR="0" lvl="0" indent="0" algn="l" rtl="0">
-                        <a:spcBef>
-                          <a:spcPts val="0"/>
-                        </a:spcBef>
-                        <a:spcAft>
-                          <a:spcPts val="0"/>
-                        </a:spcAft>
-                        <a:buClr>
-                          <a:srgbClr val="000000"/>
-                        </a:buClr>
-                        <a:buSzPts val="1100"/>
-                        <a:buFont typeface="Calibri"/>
-                        <a:buNone/>
-                      </a:pPr>
-                      <a:r>
-                        <a:rPr lang="en-US" sz="1100" u="none" strike="noStrike" cap="none">
-                          <a:solidFill>
-                            <a:srgbClr val="000000"/>
-                          </a:solidFill>
-                          <a:latin typeface="Calibri"/>
-                          <a:ea typeface="Calibri"/>
-                          <a:cs typeface="Calibri"/>
-                          <a:sym typeface="Calibri"/>
-                        </a:rPr>
-                        <a:t>TikTok Ads</a:t>
-                      </a:r>
-                      <a:endParaRPr sz="1100" u="none" strike="noStrike" cap="none">
-                        <a:latin typeface="Calibri"/>
-                        <a:ea typeface="Calibri"/>
-                        <a:cs typeface="Calibri"/>
-                        <a:sym typeface="Calibri"/>
-                      </a:endParaRPr>
-                    </a:p>
-                  </a:txBody>
-                  <a:tcPr marL="91450" marR="91450" marT="45725" marB="45725">
-                    <a:lnL w="9525" cap="flat" cmpd="sng">
-                      <a:solidFill>
-                        <a:srgbClr val="D4CCC0"/>
-                      </a:solidFill>
-                      <a:prstDash val="solid"/>
-                      <a:round/>
-                      <a:headEnd type="none" w="sm" len="sm"/>
-                      <a:tailEnd type="none" w="sm" len="sm"/>
-                    </a:lnL>
-                    <a:lnR w="9525" cap="flat" cmpd="sng">
-                      <a:solidFill>
-                        <a:srgbClr val="D4CCC0"/>
-                      </a:solidFill>
-                      <a:prstDash val="solid"/>
-                      <a:round/>
-                      <a:headEnd type="none" w="sm" len="sm"/>
-                      <a:tailEnd type="none" w="sm" len="sm"/>
-                    </a:lnR>
-                    <a:lnT w="9525" cap="flat" cmpd="sng">
-                      <a:solidFill>
-                        <a:srgbClr val="D4CCC0"/>
-                      </a:solidFill>
-                      <a:prstDash val="solid"/>
-                      <a:round/>
-                      <a:headEnd type="none" w="sm" len="sm"/>
-                      <a:tailEnd type="none" w="sm" len="sm"/>
-                    </a:lnT>
-                    <a:lnB w="9525" cap="flat" cmpd="sng">
-                      <a:solidFill>
-                        <a:srgbClr val="D4CCC0"/>
-                      </a:solidFill>
-                      <a:prstDash val="solid"/>
-                      <a:round/>
-                      <a:headEnd type="none" w="sm" len="sm"/>
-                      <a:tailEnd type="none" w="sm" len="sm"/>
-                    </a:lnB>
-                  </a:tcPr>
-                </a:tc>
-                <a:tc>
-                  <a:txBody>
-                    <a:bodyPr/>
-                    <a:lstStyle/>
-                    <a:p>
-                      <a:pPr marL="0" marR="0" lvl="0" indent="0" algn="l" rtl="0">
-                        <a:spcBef>
-                          <a:spcPts val="0"/>
-                        </a:spcBef>
-                        <a:spcAft>
-                          <a:spcPts val="0"/>
-                        </a:spcAft>
-                        <a:buClr>
-                          <a:srgbClr val="000000"/>
-                        </a:buClr>
-                        <a:buSzPts val="1200"/>
-                        <a:buFont typeface="Calibri"/>
-                        <a:buNone/>
-                      </a:pPr>
-                      <a:r>
-                        <a:rPr lang="en-US" sz="1200" u="none" strike="noStrike" cap="none">
-                          <a:solidFill>
-                            <a:srgbClr val="000000"/>
-                          </a:solidFill>
-                        </a:rPr>
-                        <a:t>1.5%</a:t>
-                      </a:r>
-                      <a:endParaRPr sz="1200" u="none" strike="noStrike" cap="none"/>
-                    </a:p>
-                  </a:txBody>
-                  <a:tcPr marL="91450" marR="91450" marT="45725" marB="45725">
-                    <a:lnL w="9525" cap="flat" cmpd="sng">
-                      <a:solidFill>
-                        <a:srgbClr val="D4CCC0"/>
-                      </a:solidFill>
-                      <a:prstDash val="solid"/>
-                      <a:round/>
-                      <a:headEnd type="none" w="sm" len="sm"/>
-                      <a:tailEnd type="none" w="sm" len="sm"/>
-                    </a:lnL>
-                    <a:lnR w="9525" cap="flat" cmpd="sng">
-                      <a:solidFill>
-                        <a:srgbClr val="D4CCC0"/>
-                      </a:solidFill>
-                      <a:prstDash val="solid"/>
-                      <a:round/>
-                      <a:headEnd type="none" w="sm" len="sm"/>
-                      <a:tailEnd type="none" w="sm" len="sm"/>
-                    </a:lnR>
-                    <a:lnT w="9525" cap="flat" cmpd="sng">
-                      <a:solidFill>
-                        <a:srgbClr val="D4CCC0"/>
-                      </a:solidFill>
-                      <a:prstDash val="solid"/>
-                      <a:round/>
-                      <a:headEnd type="none" w="sm" len="sm"/>
-                      <a:tailEnd type="none" w="sm" len="sm"/>
-                    </a:lnT>
-                    <a:lnB w="9525" cap="flat" cmpd="sng">
-                      <a:solidFill>
-                        <a:srgbClr val="D4CCC0"/>
-                      </a:solidFill>
-                      <a:prstDash val="solid"/>
-                      <a:round/>
-                      <a:headEnd type="none" w="sm" len="sm"/>
-                      <a:tailEnd type="none" w="sm" len="sm"/>
-                    </a:lnB>
-                  </a:tcPr>
-                </a:tc>
-                <a:tc>
-                  <a:txBody>
-                    <a:bodyPr/>
-                    <a:lstStyle/>
-                    <a:p>
-                      <a:pPr marL="0" marR="0" lvl="0" indent="0" algn="l" rtl="0">
-                        <a:spcBef>
-                          <a:spcPts val="0"/>
-                        </a:spcBef>
-                        <a:spcAft>
-                          <a:spcPts val="0"/>
-                        </a:spcAft>
-                        <a:buClr>
-                          <a:srgbClr val="000000"/>
-                        </a:buClr>
-                        <a:buSzPts val="1200"/>
-                        <a:buFont typeface="Calibri"/>
-                        <a:buNone/>
-                      </a:pPr>
-                      <a:r>
-                        <a:rPr lang="en-US" sz="1200" u="none" strike="noStrike" cap="none">
-                          <a:solidFill>
-                            <a:srgbClr val="000000"/>
-                          </a:solidFill>
-                        </a:rPr>
-                        <a:t>13.50 GBP</a:t>
-                      </a:r>
-                      <a:endParaRPr sz="1200" u="none" strike="noStrike" cap="none"/>
-                    </a:p>
-                  </a:txBody>
-                  <a:tcPr marL="91450" marR="91450" marT="45725" marB="45725">
-                    <a:lnL w="9525" cap="flat" cmpd="sng">
-                      <a:solidFill>
-                        <a:srgbClr val="D4CCC0"/>
-                      </a:solidFill>
-                      <a:prstDash val="solid"/>
-                      <a:round/>
-                      <a:headEnd type="none" w="sm" len="sm"/>
-                      <a:tailEnd type="none" w="sm" len="sm"/>
-                    </a:lnL>
-                    <a:lnR w="9525" cap="flat" cmpd="sng">
-                      <a:solidFill>
-                        <a:srgbClr val="D4CCC0"/>
-                      </a:solidFill>
-                      <a:prstDash val="solid"/>
-                      <a:round/>
-                      <a:headEnd type="none" w="sm" len="sm"/>
-                      <a:tailEnd type="none" w="sm" len="sm"/>
-                    </a:lnR>
-                    <a:lnT w="9525" cap="flat" cmpd="sng">
-                      <a:solidFill>
-                        <a:srgbClr val="D4CCC0"/>
-                      </a:solidFill>
-                      <a:prstDash val="solid"/>
-                      <a:round/>
-                      <a:headEnd type="none" w="sm" len="sm"/>
-                      <a:tailEnd type="none" w="sm" len="sm"/>
-                    </a:lnT>
-                    <a:lnB w="9525" cap="flat" cmpd="sng">
-                      <a:solidFill>
-                        <a:srgbClr val="D4CCC0"/>
-                      </a:solidFill>
-                      <a:prstDash val="solid"/>
-                      <a:round/>
-                      <a:headEnd type="none" w="sm" len="sm"/>
-                      <a:tailEnd type="none" w="sm" len="sm"/>
-                    </a:lnB>
-                  </a:tcPr>
-                </a:tc>
-                <a:tc>
-                  <a:txBody>
-                    <a:bodyPr/>
-                    <a:lstStyle/>
-                    <a:p>
-                      <a:pPr marL="0" marR="0" lvl="0" indent="0" algn="l" rtl="0">
-                        <a:spcBef>
-                          <a:spcPts val="0"/>
-                        </a:spcBef>
-                        <a:spcAft>
-                          <a:spcPts val="0"/>
-                        </a:spcAft>
-                        <a:buClr>
-                          <a:srgbClr val="000000"/>
-                        </a:buClr>
-                        <a:buSzPts val="1200"/>
-                        <a:buFont typeface="Calibri"/>
-                        <a:buNone/>
-                      </a:pPr>
-                      <a:r>
-                        <a:rPr lang="en-US" sz="1200" u="none" strike="noStrike" cap="none">
-                          <a:solidFill>
-                            <a:srgbClr val="000000"/>
-                          </a:solidFill>
-                        </a:rPr>
-                        <a:t>3.33x</a:t>
-                      </a:r>
-                      <a:endParaRPr sz="1200" u="none" strike="noStrike" cap="none"/>
-                    </a:p>
-                  </a:txBody>
-                  <a:tcPr marL="91450" marR="91450" marT="45725" marB="45725">
-                    <a:lnL w="9525" cap="flat" cmpd="sng">
-                      <a:solidFill>
-                        <a:srgbClr val="D4CCC0"/>
-                      </a:solidFill>
-                      <a:prstDash val="solid"/>
-                      <a:round/>
-                      <a:headEnd type="none" w="sm" len="sm"/>
-                      <a:tailEnd type="none" w="sm" len="sm"/>
-                    </a:lnL>
-                    <a:lnR w="9525" cap="flat" cmpd="sng">
-                      <a:solidFill>
-                        <a:srgbClr val="D4CCC0"/>
-                      </a:solidFill>
-                      <a:prstDash val="solid"/>
-                      <a:round/>
-                      <a:headEnd type="none" w="sm" len="sm"/>
-                      <a:tailEnd type="none" w="sm" len="sm"/>
-                    </a:lnR>
-                    <a:lnT w="9525" cap="flat" cmpd="sng">
-                      <a:solidFill>
-                        <a:srgbClr val="D4CCC0"/>
-                      </a:solidFill>
-                      <a:prstDash val="solid"/>
-                      <a:round/>
-                      <a:headEnd type="none" w="sm" len="sm"/>
-                      <a:tailEnd type="none" w="sm" len="sm"/>
-                    </a:lnT>
-                    <a:lnB w="9525" cap="flat" cmpd="sng">
-                      <a:solidFill>
-                        <a:srgbClr val="D4CCC0"/>
-                      </a:solidFill>
-                      <a:prstDash val="solid"/>
-                      <a:round/>
-                      <a:headEnd type="none" w="sm" len="sm"/>
-                      <a:tailEnd type="none" w="sm" len="sm"/>
-                    </a:lnB>
-                  </a:tcPr>
-                </a:tc>
-                <a:tc>
-                  <a:txBody>
-                    <a:bodyPr/>
-                    <a:lstStyle/>
-                    <a:p>
-                      <a:pPr marL="0" marR="0" lvl="0" indent="0" algn="l" rtl="0">
-                        <a:spcBef>
-                          <a:spcPts val="0"/>
-                        </a:spcBef>
-                        <a:spcAft>
-                          <a:spcPts val="0"/>
-                        </a:spcAft>
-                        <a:buClr>
-                          <a:srgbClr val="000000"/>
-                        </a:buClr>
-                        <a:buSzPts val="1200"/>
-                        <a:buFont typeface="Calibri"/>
-                        <a:buNone/>
-                      </a:pPr>
-                      <a:r>
-                        <a:rPr lang="en-US" sz="1200" u="none" strike="noStrike" cap="none">
-                          <a:solidFill>
-                            <a:srgbClr val="000000"/>
-                          </a:solidFill>
-                        </a:rPr>
-                        <a:t>30% of 45 </a:t>
-                      </a:r>
-                      <a:endParaRPr sz="1200" u="none" strike="noStrike" cap="none"/>
-                    </a:p>
-                  </a:txBody>
-                  <a:tcPr marL="91450" marR="91450" marT="45725" marB="45725">
-                    <a:lnL w="9525" cap="flat" cmpd="sng">
-                      <a:solidFill>
-                        <a:srgbClr val="D4CCC0"/>
-                      </a:solidFill>
-                      <a:prstDash val="solid"/>
-                      <a:round/>
-                      <a:headEnd type="none" w="sm" len="sm"/>
-                      <a:tailEnd type="none" w="sm" len="sm"/>
-                    </a:lnL>
-                    <a:lnR w="9525" cap="flat" cmpd="sng">
-                      <a:solidFill>
-                        <a:srgbClr val="D4CCC0"/>
-                      </a:solidFill>
-                      <a:prstDash val="solid"/>
-                      <a:round/>
-                      <a:headEnd type="none" w="sm" len="sm"/>
-                      <a:tailEnd type="none" w="sm" len="sm"/>
-                    </a:lnR>
-                    <a:lnT w="9525" cap="flat" cmpd="sng">
-                      <a:solidFill>
-                        <a:srgbClr val="D4CCC0"/>
-                      </a:solidFill>
-                      <a:prstDash val="solid"/>
-                      <a:round/>
-                      <a:headEnd type="none" w="sm" len="sm"/>
-                      <a:tailEnd type="none" w="sm" len="sm"/>
-                    </a:lnT>
-                    <a:lnB w="9525" cap="flat" cmpd="sng">
-                      <a:solidFill>
-                        <a:srgbClr val="D4CCC0"/>
-                      </a:solidFill>
-                      <a:prstDash val="solid"/>
-                      <a:round/>
-                      <a:headEnd type="none" w="sm" len="sm"/>
-                      <a:tailEnd type="none" w="sm" len="sm"/>
-                    </a:lnB>
-                  </a:tcPr>
-                </a:tc>
-                <a:extLst>
-                  <a:ext uri="{0D108BD9-81ED-4DB2-BD59-A6C34878D82A}">
-                    <a16:rowId xmlns:a16="http://schemas.microsoft.com/office/drawing/2014/main" val="10002"/>
-                  </a:ext>
-                </a:extLst>
-              </a:tr>
-              <a:tr h="384050">
-                <a:tc>
-                  <a:txBody>
-                    <a:bodyPr/>
-                    <a:lstStyle/>
-                    <a:p>
-                      <a:pPr marL="0" marR="0" lvl="0" indent="0" algn="l" rtl="0">
-                        <a:spcBef>
-                          <a:spcPts val="0"/>
-                        </a:spcBef>
-                        <a:spcAft>
-                          <a:spcPts val="0"/>
-                        </a:spcAft>
-                        <a:buClr>
-                          <a:srgbClr val="000000"/>
-                        </a:buClr>
-                        <a:buSzPts val="1100"/>
-                        <a:buFont typeface="Calibri"/>
-                        <a:buNone/>
-                      </a:pPr>
-                      <a:r>
-                        <a:rPr lang="en-US" sz="1100" u="none" strike="noStrike" cap="none">
-                          <a:solidFill>
-                            <a:srgbClr val="000000"/>
-                          </a:solidFill>
-                          <a:latin typeface="Calibri"/>
-                          <a:ea typeface="Calibri"/>
-                          <a:cs typeface="Calibri"/>
-                          <a:sym typeface="Calibri"/>
-                        </a:rPr>
                         <a:t>Google Search</a:t>
                       </a:r>
                       <a:endParaRPr sz="1100" u="none" strike="noStrike" cap="none">
@@ -13025,7 +12336,7 @@
                             <a:srgbClr val="000000"/>
                           </a:solidFill>
                         </a:rPr>
-                        <a:t>4.5%</a:t>
+                        <a:t>6.5%</a:t>
                       </a:r>
                       <a:endParaRPr sz="1200" u="none" strike="noStrike" cap="none"/>
                     </a:p>
@@ -13232,9 +12543,731 @@
                             <a:srgbClr val="000000"/>
                           </a:solidFill>
                         </a:rPr>
-                        <a:t>19% of 45 </a:t>
+                        <a:t>19% of 45</a:t>
                       </a:r>
                       <a:endParaRPr sz="1200" u="none" strike="noStrike" cap="none"/>
+                    </a:p>
+                  </a:txBody>
+                  <a:tcPr marL="91450" marR="91450" marT="45725" marB="45725">
+                    <a:lnL w="9525" cap="flat" cmpd="sng">
+                      <a:solidFill>
+                        <a:srgbClr val="D4CCC0"/>
+                      </a:solidFill>
+                      <a:prstDash val="solid"/>
+                      <a:round/>
+                      <a:headEnd type="none" w="sm" len="sm"/>
+                      <a:tailEnd type="none" w="sm" len="sm"/>
+                    </a:lnL>
+                    <a:lnR w="9525" cap="flat" cmpd="sng">
+                      <a:solidFill>
+                        <a:srgbClr val="D4CCC0"/>
+                      </a:solidFill>
+                      <a:prstDash val="solid"/>
+                      <a:round/>
+                      <a:headEnd type="none" w="sm" len="sm"/>
+                      <a:tailEnd type="none" w="sm" len="sm"/>
+                    </a:lnR>
+                    <a:lnT w="9525" cap="flat" cmpd="sng">
+                      <a:solidFill>
+                        <a:srgbClr val="D4CCC0"/>
+                      </a:solidFill>
+                      <a:prstDash val="solid"/>
+                      <a:round/>
+                      <a:headEnd type="none" w="sm" len="sm"/>
+                      <a:tailEnd type="none" w="sm" len="sm"/>
+                    </a:lnT>
+                    <a:lnB w="9525" cap="flat" cmpd="sng">
+                      <a:solidFill>
+                        <a:srgbClr val="D4CCC0"/>
+                      </a:solidFill>
+                      <a:prstDash val="solid"/>
+                      <a:round/>
+                      <a:headEnd type="none" w="sm" len="sm"/>
+                      <a:tailEnd type="none" w="sm" len="sm"/>
+                    </a:lnB>
+                  </a:tcPr>
+                </a:tc>
+                <a:extLst>
+                  <a:ext uri="{0D108BD9-81ED-4DB2-BD59-A6C34878D82A}">
+                    <a16:rowId xmlns:a16="http://schemas.microsoft.com/office/drawing/2014/main" val="10001"/>
+                  </a:ext>
+                </a:extLst>
+              </a:tr>
+              <a:tr h="384050">
+                <a:tc>
+                  <a:txBody>
+                    <a:bodyPr/>
+                    <a:lstStyle/>
+                    <a:p>
+                      <a:pPr marL="0" marR="0" lvl="0" indent="0" algn="l" rtl="0">
+                        <a:spcBef>
+                          <a:spcPts val="0"/>
+                        </a:spcBef>
+                        <a:spcAft>
+                          <a:spcPts val="0"/>
+                        </a:spcAft>
+                        <a:buClr>
+                          <a:srgbClr val="000000"/>
+                        </a:buClr>
+                        <a:buSzPts val="1100"/>
+                        <a:buFont typeface="Calibri"/>
+                        <a:buNone/>
+                      </a:pPr>
+                      <a:r>
+                        <a:rPr lang="en-US" sz="1100" u="none" strike="noStrike" cap="none" dirty="0">
+                          <a:solidFill>
+                            <a:srgbClr val="000000"/>
+                          </a:solidFill>
+                          <a:latin typeface="Calibri"/>
+                          <a:ea typeface="Calibri"/>
+                          <a:cs typeface="Calibri"/>
+                          <a:sym typeface="Calibri"/>
+                        </a:rPr>
+                        <a:t>Retargeting </a:t>
+                      </a:r>
+                      <a:endParaRPr sz="1100" u="none" strike="noStrike" cap="none" dirty="0">
+                        <a:latin typeface="Calibri"/>
+                        <a:ea typeface="Calibri"/>
+                        <a:cs typeface="Calibri"/>
+                        <a:sym typeface="Calibri"/>
+                      </a:endParaRPr>
+                    </a:p>
+                  </a:txBody>
+                  <a:tcPr marL="91450" marR="91450" marT="45725" marB="45725">
+                    <a:lnL w="9525" cap="flat" cmpd="sng">
+                      <a:solidFill>
+                        <a:srgbClr val="D4CCC0"/>
+                      </a:solidFill>
+                      <a:prstDash val="solid"/>
+                      <a:round/>
+                      <a:headEnd type="none" w="sm" len="sm"/>
+                      <a:tailEnd type="none" w="sm" len="sm"/>
+                    </a:lnL>
+                    <a:lnR w="9525" cap="flat" cmpd="sng">
+                      <a:solidFill>
+                        <a:srgbClr val="D4CCC0"/>
+                      </a:solidFill>
+                      <a:prstDash val="solid"/>
+                      <a:round/>
+                      <a:headEnd type="none" w="sm" len="sm"/>
+                      <a:tailEnd type="none" w="sm" len="sm"/>
+                    </a:lnR>
+                    <a:lnT w="9525" cap="flat" cmpd="sng">
+                      <a:solidFill>
+                        <a:srgbClr val="D4CCC0"/>
+                      </a:solidFill>
+                      <a:prstDash val="solid"/>
+                      <a:round/>
+                      <a:headEnd type="none" w="sm" len="sm"/>
+                      <a:tailEnd type="none" w="sm" len="sm"/>
+                    </a:lnT>
+                    <a:lnB w="9525" cap="flat" cmpd="sng">
+                      <a:solidFill>
+                        <a:srgbClr val="D4CCC0"/>
+                      </a:solidFill>
+                      <a:prstDash val="solid"/>
+                      <a:round/>
+                      <a:headEnd type="none" w="sm" len="sm"/>
+                      <a:tailEnd type="none" w="sm" len="sm"/>
+                    </a:lnB>
+                  </a:tcPr>
+                </a:tc>
+                <a:tc>
+                  <a:txBody>
+                    <a:bodyPr/>
+                    <a:lstStyle/>
+                    <a:p>
+                      <a:pPr marL="0" marR="0" lvl="0" indent="0" algn="l" rtl="0">
+                        <a:spcBef>
+                          <a:spcPts val="0"/>
+                        </a:spcBef>
+                        <a:spcAft>
+                          <a:spcPts val="0"/>
+                        </a:spcAft>
+                        <a:buClr>
+                          <a:srgbClr val="000000"/>
+                        </a:buClr>
+                        <a:buSzPts val="1200"/>
+                        <a:buFont typeface="Calibri"/>
+                        <a:buNone/>
+                      </a:pPr>
+                      <a:r>
+                        <a:rPr lang="en-US" sz="1200" u="none" strike="noStrike" cap="none">
+                          <a:solidFill>
+                            <a:srgbClr val="000000"/>
+                          </a:solidFill>
+                        </a:rPr>
+                        <a:t>3.2%</a:t>
+                      </a:r>
+                      <a:endParaRPr sz="1200" u="none" strike="noStrike" cap="none"/>
+                    </a:p>
+                  </a:txBody>
+                  <a:tcPr marL="91450" marR="91450" marT="45725" marB="45725">
+                    <a:lnL w="9525" cap="flat" cmpd="sng">
+                      <a:solidFill>
+                        <a:srgbClr val="D4CCC0"/>
+                      </a:solidFill>
+                      <a:prstDash val="solid"/>
+                      <a:round/>
+                      <a:headEnd type="none" w="sm" len="sm"/>
+                      <a:tailEnd type="none" w="sm" len="sm"/>
+                    </a:lnL>
+                    <a:lnR w="9525" cap="flat" cmpd="sng">
+                      <a:solidFill>
+                        <a:srgbClr val="D4CCC0"/>
+                      </a:solidFill>
+                      <a:prstDash val="solid"/>
+                      <a:round/>
+                      <a:headEnd type="none" w="sm" len="sm"/>
+                      <a:tailEnd type="none" w="sm" len="sm"/>
+                    </a:lnR>
+                    <a:lnT w="9525" cap="flat" cmpd="sng">
+                      <a:solidFill>
+                        <a:srgbClr val="D4CCC0"/>
+                      </a:solidFill>
+                      <a:prstDash val="solid"/>
+                      <a:round/>
+                      <a:headEnd type="none" w="sm" len="sm"/>
+                      <a:tailEnd type="none" w="sm" len="sm"/>
+                    </a:lnT>
+                    <a:lnB w="9525" cap="flat" cmpd="sng">
+                      <a:solidFill>
+                        <a:srgbClr val="D4CCC0"/>
+                      </a:solidFill>
+                      <a:prstDash val="solid"/>
+                      <a:round/>
+                      <a:headEnd type="none" w="sm" len="sm"/>
+                      <a:tailEnd type="none" w="sm" len="sm"/>
+                    </a:lnB>
+                  </a:tcPr>
+                </a:tc>
+                <a:tc>
+                  <a:txBody>
+                    <a:bodyPr/>
+                    <a:lstStyle/>
+                    <a:p>
+                      <a:pPr marL="0" marR="0" lvl="0" indent="0" algn="l" rtl="0">
+                        <a:spcBef>
+                          <a:spcPts val="0"/>
+                        </a:spcBef>
+                        <a:spcAft>
+                          <a:spcPts val="0"/>
+                        </a:spcAft>
+                        <a:buClr>
+                          <a:srgbClr val="000000"/>
+                        </a:buClr>
+                        <a:buSzPts val="1200"/>
+                        <a:buFont typeface="Calibri"/>
+                        <a:buNone/>
+                      </a:pPr>
+                      <a:r>
+                        <a:rPr lang="en-US" sz="1200" u="none" strike="noStrike" cap="none">
+                          <a:solidFill>
+                            <a:srgbClr val="000000"/>
+                          </a:solidFill>
+                        </a:rPr>
+                        <a:t>7.65 GBP</a:t>
+                      </a:r>
+                      <a:endParaRPr sz="1200" u="none" strike="noStrike" cap="none"/>
+                    </a:p>
+                  </a:txBody>
+                  <a:tcPr marL="91450" marR="91450" marT="45725" marB="45725">
+                    <a:lnL w="9525" cap="flat" cmpd="sng">
+                      <a:solidFill>
+                        <a:srgbClr val="D4CCC0"/>
+                      </a:solidFill>
+                      <a:prstDash val="solid"/>
+                      <a:round/>
+                      <a:headEnd type="none" w="sm" len="sm"/>
+                      <a:tailEnd type="none" w="sm" len="sm"/>
+                    </a:lnL>
+                    <a:lnR w="9525" cap="flat" cmpd="sng">
+                      <a:solidFill>
+                        <a:srgbClr val="D4CCC0"/>
+                      </a:solidFill>
+                      <a:prstDash val="solid"/>
+                      <a:round/>
+                      <a:headEnd type="none" w="sm" len="sm"/>
+                      <a:tailEnd type="none" w="sm" len="sm"/>
+                    </a:lnR>
+                    <a:lnT w="9525" cap="flat" cmpd="sng">
+                      <a:solidFill>
+                        <a:srgbClr val="D4CCC0"/>
+                      </a:solidFill>
+                      <a:prstDash val="solid"/>
+                      <a:round/>
+                      <a:headEnd type="none" w="sm" len="sm"/>
+                      <a:tailEnd type="none" w="sm" len="sm"/>
+                    </a:lnT>
+                    <a:lnB w="9525" cap="flat" cmpd="sng">
+                      <a:solidFill>
+                        <a:srgbClr val="D4CCC0"/>
+                      </a:solidFill>
+                      <a:prstDash val="solid"/>
+                      <a:round/>
+                      <a:headEnd type="none" w="sm" len="sm"/>
+                      <a:tailEnd type="none" w="sm" len="sm"/>
+                    </a:lnB>
+                  </a:tcPr>
+                </a:tc>
+                <a:tc>
+                  <a:txBody>
+                    <a:bodyPr/>
+                    <a:lstStyle/>
+                    <a:p>
+                      <a:pPr marL="0" marR="0" lvl="0" indent="0" algn="l" rtl="0">
+                        <a:spcBef>
+                          <a:spcPts val="0"/>
+                        </a:spcBef>
+                        <a:spcAft>
+                          <a:spcPts val="0"/>
+                        </a:spcAft>
+                        <a:buClr>
+                          <a:srgbClr val="000000"/>
+                        </a:buClr>
+                        <a:buSzPts val="1200"/>
+                        <a:buFont typeface="Calibri"/>
+                        <a:buNone/>
+                      </a:pPr>
+                      <a:r>
+                        <a:rPr lang="en-US" sz="1200" u="none" strike="noStrike" cap="none">
+                          <a:solidFill>
+                            <a:srgbClr val="000000"/>
+                          </a:solidFill>
+                        </a:rPr>
+                        <a:t>5.88x</a:t>
+                      </a:r>
+                      <a:endParaRPr sz="1200" u="none" strike="noStrike" cap="none"/>
+                    </a:p>
+                  </a:txBody>
+                  <a:tcPr marL="91450" marR="91450" marT="45725" marB="45725">
+                    <a:lnL w="9525" cap="flat" cmpd="sng">
+                      <a:solidFill>
+                        <a:srgbClr val="D4CCC0"/>
+                      </a:solidFill>
+                      <a:prstDash val="solid"/>
+                      <a:round/>
+                      <a:headEnd type="none" w="sm" len="sm"/>
+                      <a:tailEnd type="none" w="sm" len="sm"/>
+                    </a:lnL>
+                    <a:lnR w="9525" cap="flat" cmpd="sng">
+                      <a:solidFill>
+                        <a:srgbClr val="D4CCC0"/>
+                      </a:solidFill>
+                      <a:prstDash val="solid"/>
+                      <a:round/>
+                      <a:headEnd type="none" w="sm" len="sm"/>
+                      <a:tailEnd type="none" w="sm" len="sm"/>
+                    </a:lnR>
+                    <a:lnT w="9525" cap="flat" cmpd="sng">
+                      <a:solidFill>
+                        <a:srgbClr val="D4CCC0"/>
+                      </a:solidFill>
+                      <a:prstDash val="solid"/>
+                      <a:round/>
+                      <a:headEnd type="none" w="sm" len="sm"/>
+                      <a:tailEnd type="none" w="sm" len="sm"/>
+                    </a:lnT>
+                    <a:lnB w="9525" cap="flat" cmpd="sng">
+                      <a:solidFill>
+                        <a:srgbClr val="D4CCC0"/>
+                      </a:solidFill>
+                      <a:prstDash val="solid"/>
+                      <a:round/>
+                      <a:headEnd type="none" w="sm" len="sm"/>
+                      <a:tailEnd type="none" w="sm" len="sm"/>
+                    </a:lnB>
+                  </a:tcPr>
+                </a:tc>
+                <a:tc>
+                  <a:txBody>
+                    <a:bodyPr/>
+                    <a:lstStyle/>
+                    <a:p>
+                      <a:pPr marL="0" marR="0" lvl="0" indent="0" algn="l" rtl="0">
+                        <a:spcBef>
+                          <a:spcPts val="0"/>
+                        </a:spcBef>
+                        <a:spcAft>
+                          <a:spcPts val="0"/>
+                        </a:spcAft>
+                        <a:buClr>
+                          <a:srgbClr val="000000"/>
+                        </a:buClr>
+                        <a:buSzPts val="1200"/>
+                        <a:buFont typeface="Calibri"/>
+                        <a:buNone/>
+                      </a:pPr>
+                      <a:r>
+                        <a:rPr lang="en-US" sz="1200" u="none" strike="noStrike" cap="none">
+                          <a:solidFill>
+                            <a:srgbClr val="000000"/>
+                          </a:solidFill>
+                        </a:rPr>
+                        <a:t>17% of 45</a:t>
+                      </a:r>
+                      <a:endParaRPr sz="1200" u="none" strike="noStrike" cap="none"/>
+                    </a:p>
+                  </a:txBody>
+                  <a:tcPr marL="91450" marR="91450" marT="45725" marB="45725">
+                    <a:lnL w="9525" cap="flat" cmpd="sng">
+                      <a:solidFill>
+                        <a:srgbClr val="D4CCC0"/>
+                      </a:solidFill>
+                      <a:prstDash val="solid"/>
+                      <a:round/>
+                      <a:headEnd type="none" w="sm" len="sm"/>
+                      <a:tailEnd type="none" w="sm" len="sm"/>
+                    </a:lnL>
+                    <a:lnR w="9525" cap="flat" cmpd="sng">
+                      <a:solidFill>
+                        <a:srgbClr val="D4CCC0"/>
+                      </a:solidFill>
+                      <a:prstDash val="solid"/>
+                      <a:round/>
+                      <a:headEnd type="none" w="sm" len="sm"/>
+                      <a:tailEnd type="none" w="sm" len="sm"/>
+                    </a:lnR>
+                    <a:lnT w="9525" cap="flat" cmpd="sng">
+                      <a:solidFill>
+                        <a:srgbClr val="D4CCC0"/>
+                      </a:solidFill>
+                      <a:prstDash val="solid"/>
+                      <a:round/>
+                      <a:headEnd type="none" w="sm" len="sm"/>
+                      <a:tailEnd type="none" w="sm" len="sm"/>
+                    </a:lnT>
+                    <a:lnB w="9525" cap="flat" cmpd="sng">
+                      <a:solidFill>
+                        <a:srgbClr val="D4CCC0"/>
+                      </a:solidFill>
+                      <a:prstDash val="solid"/>
+                      <a:round/>
+                      <a:headEnd type="none" w="sm" len="sm"/>
+                      <a:tailEnd type="none" w="sm" len="sm"/>
+                    </a:lnB>
+                  </a:tcPr>
+                </a:tc>
+                <a:extLst>
+                  <a:ext uri="{0D108BD9-81ED-4DB2-BD59-A6C34878D82A}">
+                    <a16:rowId xmlns:a16="http://schemas.microsoft.com/office/drawing/2014/main" val="10002"/>
+                  </a:ext>
+                </a:extLst>
+              </a:tr>
+              <a:tr h="384050">
+                <a:tc>
+                  <a:txBody>
+                    <a:bodyPr/>
+                    <a:lstStyle/>
+                    <a:p>
+                      <a:pPr marL="0" marR="0" lvl="0" indent="0" algn="l" rtl="0">
+                        <a:spcBef>
+                          <a:spcPts val="0"/>
+                        </a:spcBef>
+                        <a:spcAft>
+                          <a:spcPts val="0"/>
+                        </a:spcAft>
+                        <a:buClr>
+                          <a:srgbClr val="000000"/>
+                        </a:buClr>
+                        <a:buSzPts val="1100"/>
+                        <a:buFont typeface="Calibri"/>
+                        <a:buNone/>
+                      </a:pPr>
+                      <a:r>
+                        <a:rPr lang="en-US" sz="1100" u="none" strike="noStrike" cap="none">
+                          <a:solidFill>
+                            <a:srgbClr val="000000"/>
+                          </a:solidFill>
+                          <a:latin typeface="Calibri"/>
+                          <a:ea typeface="Calibri"/>
+                          <a:cs typeface="Calibri"/>
+                          <a:sym typeface="Calibri"/>
+                        </a:rPr>
+                        <a:t>Meta Ads</a:t>
+                      </a:r>
+                      <a:endParaRPr sz="1100" u="none" strike="noStrike" cap="none">
+                        <a:latin typeface="Calibri"/>
+                        <a:ea typeface="Calibri"/>
+                        <a:cs typeface="Calibri"/>
+                        <a:sym typeface="Calibri"/>
+                      </a:endParaRPr>
+                    </a:p>
+                  </a:txBody>
+                  <a:tcPr marL="91450" marR="91450" marT="45725" marB="45725">
+                    <a:lnL w="9525" cap="flat" cmpd="sng">
+                      <a:solidFill>
+                        <a:srgbClr val="D4CCC0"/>
+                      </a:solidFill>
+                      <a:prstDash val="solid"/>
+                      <a:round/>
+                      <a:headEnd type="none" w="sm" len="sm"/>
+                      <a:tailEnd type="none" w="sm" len="sm"/>
+                    </a:lnL>
+                    <a:lnR w="9525" cap="flat" cmpd="sng">
+                      <a:solidFill>
+                        <a:srgbClr val="D4CCC0"/>
+                      </a:solidFill>
+                      <a:prstDash val="solid"/>
+                      <a:round/>
+                      <a:headEnd type="none" w="sm" len="sm"/>
+                      <a:tailEnd type="none" w="sm" len="sm"/>
+                    </a:lnR>
+                    <a:lnT w="9525" cap="flat" cmpd="sng">
+                      <a:solidFill>
+                        <a:srgbClr val="D4CCC0"/>
+                      </a:solidFill>
+                      <a:prstDash val="solid"/>
+                      <a:round/>
+                      <a:headEnd type="none" w="sm" len="sm"/>
+                      <a:tailEnd type="none" w="sm" len="sm"/>
+                    </a:lnT>
+                    <a:lnB w="9525" cap="flat" cmpd="sng">
+                      <a:solidFill>
+                        <a:srgbClr val="D4CCC0"/>
+                      </a:solidFill>
+                      <a:prstDash val="solid"/>
+                      <a:round/>
+                      <a:headEnd type="none" w="sm" len="sm"/>
+                      <a:tailEnd type="none" w="sm" len="sm"/>
+                    </a:lnB>
+                  </a:tcPr>
+                </a:tc>
+                <a:tc>
+                  <a:txBody>
+                    <a:bodyPr/>
+                    <a:lstStyle/>
+                    <a:p>
+                      <a:pPr marL="0" marR="0" lvl="0" indent="0" algn="l" rtl="0">
+                        <a:spcBef>
+                          <a:spcPts val="0"/>
+                        </a:spcBef>
+                        <a:spcAft>
+                          <a:spcPts val="0"/>
+                        </a:spcAft>
+                        <a:buClr>
+                          <a:srgbClr val="000000"/>
+                        </a:buClr>
+                        <a:buSzPts val="1200"/>
+                        <a:buFont typeface="Calibri"/>
+                        <a:buNone/>
+                      </a:pPr>
+                      <a:r>
+                        <a:rPr lang="en-US" sz="1200" u="none" strike="noStrike" cap="none">
+                          <a:solidFill>
+                            <a:srgbClr val="000000"/>
+                          </a:solidFill>
+                        </a:rPr>
+                        <a:t>1.6%</a:t>
+                      </a:r>
+                      <a:endParaRPr sz="1200" u="none" strike="noStrike" cap="none"/>
+                    </a:p>
+                  </a:txBody>
+                  <a:tcPr marL="91450" marR="91450" marT="45725" marB="45725">
+                    <a:lnL w="9525" cap="flat" cmpd="sng">
+                      <a:solidFill>
+                        <a:srgbClr val="D4CCC0"/>
+                      </a:solidFill>
+                      <a:prstDash val="solid"/>
+                      <a:round/>
+                      <a:headEnd type="none" w="sm" len="sm"/>
+                      <a:tailEnd type="none" w="sm" len="sm"/>
+                    </a:lnL>
+                    <a:lnR w="9525" cap="flat" cmpd="sng">
+                      <a:solidFill>
+                        <a:srgbClr val="D4CCC0"/>
+                      </a:solidFill>
+                      <a:prstDash val="solid"/>
+                      <a:round/>
+                      <a:headEnd type="none" w="sm" len="sm"/>
+                      <a:tailEnd type="none" w="sm" len="sm"/>
+                    </a:lnR>
+                    <a:lnT w="9525" cap="flat" cmpd="sng">
+                      <a:solidFill>
+                        <a:srgbClr val="D4CCC0"/>
+                      </a:solidFill>
+                      <a:prstDash val="solid"/>
+                      <a:round/>
+                      <a:headEnd type="none" w="sm" len="sm"/>
+                      <a:tailEnd type="none" w="sm" len="sm"/>
+                    </a:lnT>
+                    <a:lnB w="9525" cap="flat" cmpd="sng">
+                      <a:solidFill>
+                        <a:srgbClr val="D4CCC0"/>
+                      </a:solidFill>
+                      <a:prstDash val="solid"/>
+                      <a:round/>
+                      <a:headEnd type="none" w="sm" len="sm"/>
+                      <a:tailEnd type="none" w="sm" len="sm"/>
+                    </a:lnB>
+                  </a:tcPr>
+                </a:tc>
+                <a:tc>
+                  <a:txBody>
+                    <a:bodyPr/>
+                    <a:lstStyle/>
+                    <a:p>
+                      <a:pPr marL="0" marR="0" lvl="0" indent="0" algn="l" rtl="0">
+                        <a:spcBef>
+                          <a:spcPts val="0"/>
+                        </a:spcBef>
+                        <a:spcAft>
+                          <a:spcPts val="0"/>
+                        </a:spcAft>
+                        <a:buClr>
+                          <a:srgbClr val="000000"/>
+                        </a:buClr>
+                        <a:buSzPts val="1200"/>
+                        <a:buFont typeface="Calibri"/>
+                        <a:buNone/>
+                      </a:pPr>
+                      <a:r>
+                        <a:rPr lang="en-US" sz="1200" u="none" strike="noStrike" cap="none">
+                          <a:solidFill>
+                            <a:srgbClr val="000000"/>
+                          </a:solidFill>
+                        </a:rPr>
+                        <a:t>12.60 GBP</a:t>
+                      </a:r>
+                      <a:endParaRPr sz="1200" u="none" strike="noStrike" cap="none"/>
+                    </a:p>
+                  </a:txBody>
+                  <a:tcPr marL="91450" marR="91450" marT="45725" marB="45725">
+                    <a:lnL w="9525" cap="flat" cmpd="sng">
+                      <a:solidFill>
+                        <a:srgbClr val="D4CCC0"/>
+                      </a:solidFill>
+                      <a:prstDash val="solid"/>
+                      <a:round/>
+                      <a:headEnd type="none" w="sm" len="sm"/>
+                      <a:tailEnd type="none" w="sm" len="sm"/>
+                    </a:lnL>
+                    <a:lnR w="9525" cap="flat" cmpd="sng">
+                      <a:solidFill>
+                        <a:srgbClr val="D4CCC0"/>
+                      </a:solidFill>
+                      <a:prstDash val="solid"/>
+                      <a:round/>
+                      <a:headEnd type="none" w="sm" len="sm"/>
+                      <a:tailEnd type="none" w="sm" len="sm"/>
+                    </a:lnR>
+                    <a:lnT w="9525" cap="flat" cmpd="sng">
+                      <a:solidFill>
+                        <a:srgbClr val="D4CCC0"/>
+                      </a:solidFill>
+                      <a:prstDash val="solid"/>
+                      <a:round/>
+                      <a:headEnd type="none" w="sm" len="sm"/>
+                      <a:tailEnd type="none" w="sm" len="sm"/>
+                    </a:lnT>
+                    <a:lnB w="9525" cap="flat" cmpd="sng">
+                      <a:solidFill>
+                        <a:srgbClr val="D4CCC0"/>
+                      </a:solidFill>
+                      <a:prstDash val="solid"/>
+                      <a:round/>
+                      <a:headEnd type="none" w="sm" len="sm"/>
+                      <a:tailEnd type="none" w="sm" len="sm"/>
+                    </a:lnB>
+                  </a:tcPr>
+                </a:tc>
+                <a:tc>
+                  <a:txBody>
+                    <a:bodyPr/>
+                    <a:lstStyle/>
+                    <a:p>
+                      <a:pPr marL="0" marR="0" lvl="0" indent="0" algn="l" rtl="0">
+                        <a:spcBef>
+                          <a:spcPts val="0"/>
+                        </a:spcBef>
+                        <a:spcAft>
+                          <a:spcPts val="0"/>
+                        </a:spcAft>
+                        <a:buClr>
+                          <a:srgbClr val="000000"/>
+                        </a:buClr>
+                        <a:buSzPts val="1200"/>
+                        <a:buFont typeface="Calibri"/>
+                        <a:buNone/>
+                      </a:pPr>
+                      <a:r>
+                        <a:rPr lang="en-US" sz="1200" u="none" strike="noStrike" cap="none">
+                          <a:solidFill>
+                            <a:srgbClr val="000000"/>
+                          </a:solidFill>
+                        </a:rPr>
+                        <a:t>3.57x</a:t>
+                      </a:r>
+                      <a:endParaRPr sz="1200" u="none" strike="noStrike" cap="none"/>
+                    </a:p>
+                  </a:txBody>
+                  <a:tcPr marL="91450" marR="91450" marT="45725" marB="45725">
+                    <a:lnL w="9525" cap="flat" cmpd="sng">
+                      <a:solidFill>
+                        <a:srgbClr val="D4CCC0"/>
+                      </a:solidFill>
+                      <a:prstDash val="solid"/>
+                      <a:round/>
+                      <a:headEnd type="none" w="sm" len="sm"/>
+                      <a:tailEnd type="none" w="sm" len="sm"/>
+                    </a:lnL>
+                    <a:lnR w="9525" cap="flat" cmpd="sng">
+                      <a:solidFill>
+                        <a:srgbClr val="D4CCC0"/>
+                      </a:solidFill>
+                      <a:prstDash val="solid"/>
+                      <a:round/>
+                      <a:headEnd type="none" w="sm" len="sm"/>
+                      <a:tailEnd type="none" w="sm" len="sm"/>
+                    </a:lnR>
+                    <a:lnT w="9525" cap="flat" cmpd="sng">
+                      <a:solidFill>
+                        <a:srgbClr val="D4CCC0"/>
+                      </a:solidFill>
+                      <a:prstDash val="solid"/>
+                      <a:round/>
+                      <a:headEnd type="none" w="sm" len="sm"/>
+                      <a:tailEnd type="none" w="sm" len="sm"/>
+                    </a:lnT>
+                    <a:lnB w="9525" cap="flat" cmpd="sng">
+                      <a:solidFill>
+                        <a:srgbClr val="D4CCC0"/>
+                      </a:solidFill>
+                      <a:prstDash val="solid"/>
+                      <a:round/>
+                      <a:headEnd type="none" w="sm" len="sm"/>
+                      <a:tailEnd type="none" w="sm" len="sm"/>
+                    </a:lnB>
+                  </a:tcPr>
+                </a:tc>
+                <a:tc>
+                  <a:txBody>
+                    <a:bodyPr/>
+                    <a:lstStyle/>
+                    <a:p>
+                      <a:pPr marL="0" marR="0" lvl="0" indent="0" algn="l" rtl="0">
+                        <a:spcBef>
+                          <a:spcPts val="0"/>
+                        </a:spcBef>
+                        <a:spcAft>
+                          <a:spcPts val="0"/>
+                        </a:spcAft>
+                        <a:buClr>
+                          <a:srgbClr val="000000"/>
+                        </a:buClr>
+                        <a:buSzPts val="1200"/>
+                        <a:buFont typeface="Calibri"/>
+                        <a:buNone/>
+                      </a:pPr>
+                      <a:r>
+                        <a:rPr lang="en-US" sz="1200" u="none" strike="noStrike" cap="none" dirty="0">
+                          <a:solidFill>
+                            <a:srgbClr val="000000"/>
+                          </a:solidFill>
+                        </a:rPr>
+                        <a:t>28% of 45</a:t>
+                      </a:r>
+                      <a:endParaRPr sz="1200" u="none" strike="noStrike" cap="none" dirty="0"/>
                     </a:p>
                   </a:txBody>
                   <a:tcPr marL="91450" marR="91450" marT="45725" marB="45725">
@@ -14014,7 +14047,7 @@
                 <a:cs typeface="Calibri"/>
                 <a:sym typeface="Calibri"/>
               </a:rPr>
-              <a:t>“This conversion-stage campaign targets UK and US women aged 22 to 38 with an interest in skincare and wellness, with the single objective of driving first-time purchases of GlowDrop’s Morning Boost Serum at 45 GBP. The 5,000 GBP monthly budget is split across Meta Ads (2,500 GBP, 50%), TikTok Ads (1,500 GBP, 30%), and Google Search (1,000 GBP, 20%), with Meta Ads leading as the primary conversion channel, TikTok Ads scaling GlowDrop’s existing 42k-follower organic presence through lookalike audiences, and Google Search capturing high-intent buyers already searching for morning serums. KPI targets are a CPA of 11.25 GBP and ROAS of 4.00x on Meta Ads, a CPA of 13.50 GBP and ROAS of 3.33x on TikTok Ads, and a CPA of 8.55 GBP and ROAS of 5.26x on Google Search. Creative should foreground GlowDrop’s clean-ingredient and dermatologist-tested credentials across all three channels.”</a:t>
+              <a:t>“This conversion-stage campaign targets UK and US women aged 22 to 38 with an interest in skincare and wellness, with the single objective of driving first-time purchases of GlowDrop’s Morning Boost Serum at 45 GBP. The 5,000 GBP monthly budget is split across Google Search (2,500 GBP, 50%), Retargeting (1,500 GBP, 30%), and Meta Ads (1,000 GBP, 20%), with Google Search leading as the highest-intent conversion channel, Retargeting re-engaging skincare-interested shoppers who already know GlowDrop, and Meta Ads extending reach to skincare and wellness audiences. KPI targets are a CPA of 8.55 GBP and ROAS of 5.26x on Google Search, a CPA of 7.65 GBP and ROAS of 5.88x on Retargeting, and a CPA of 12.60 GBP and ROAS of 3.57x on Meta Ads. Creative should foreground GlowDrop’s clean-ingredient and dermatologist-tested credentials across all three channels.”</a:t>
             </a:r>
             <a:endParaRPr sz="1300">
               <a:solidFill>
